--- a/Sem 4/RDBMS/Module 5/5.1_5.2TRANSACTION MGMT.pptx
+++ b/Sem 4/RDBMS/Module 5/5.1_5.2TRANSACTION MGMT.pptx
@@ -21116,7 +21116,7 @@
               <a:buChar char="●"/>
             </a:pPr>
             <a:r>
-              <a:rPr lang="en-US" sz="1800" b="1" i="0" u="none">
+              <a:rPr lang="en-US" sz="1800" b="1" i="0" u="none" dirty="0">
                 <a:solidFill>
                   <a:schemeClr val="dk1"/>
                 </a:solidFill>
@@ -21128,7 +21128,7 @@
               <a:t>Basic Assumption</a:t>
             </a:r>
             <a:r>
-              <a:rPr lang="en-US" sz="1800" b="0" i="0" u="none">
+              <a:rPr lang="en-US" sz="1800" b="0" i="0" u="none" dirty="0">
                 <a:solidFill>
                   <a:schemeClr val="dk1"/>
                 </a:solidFill>
@@ -21139,7 +21139,7 @@
               </a:rPr>
               <a:t> – Each transaction preserves database consistency.</a:t>
             </a:r>
-            <a:endParaRPr/>
+            <a:endParaRPr dirty="0"/>
           </a:p>
           <a:p>
             <a:pPr marL="342900" lvl="0" indent="-342900" algn="l" rtl="0">
@@ -21160,7 +21160,7 @@
               <a:buChar char="●"/>
             </a:pPr>
             <a:r>
-              <a:rPr lang="en-US" sz="1800" b="0" i="0" u="none">
+              <a:rPr lang="en-US" sz="1800" b="0" i="0" u="none" dirty="0">
                 <a:solidFill>
                   <a:schemeClr val="dk1"/>
                 </a:solidFill>
@@ -21171,7 +21171,7 @@
               </a:rPr>
               <a:t>Thus serial execution of a set of transactions preserves database consistency.</a:t>
             </a:r>
-            <a:endParaRPr/>
+            <a:endParaRPr dirty="0"/>
           </a:p>
           <a:p>
             <a:pPr marL="342900" lvl="0" indent="-342900" algn="l" rtl="0">
@@ -21192,10 +21192,13 @@
               <a:buChar char="●"/>
             </a:pPr>
             <a:r>
-              <a:rPr lang="en-US" sz="1800" b="0" i="0" u="none">
-                <a:solidFill>
-                  <a:schemeClr val="dk1"/>
-                </a:solidFill>
+              <a:rPr lang="en-US" sz="1800" b="0" i="0" u="none" dirty="0">
+                <a:solidFill>
+                  <a:schemeClr val="dk1"/>
+                </a:solidFill>
+                <a:highlight>
+                  <a:srgbClr val="FFFF00"/>
+                </a:highlight>
                 <a:latin typeface="Helvetica Neue"/>
                 <a:ea typeface="Helvetica Neue"/>
                 <a:cs typeface="Helvetica Neue"/>
@@ -21203,7 +21206,11 @@
               </a:rPr>
               <a:t>A (possibly concurrent) schedule is serializable if it is equivalent to a serial schedule.  Different forms of schedule equivalence give rise to the notions of:</a:t>
             </a:r>
-            <a:endParaRPr/>
+            <a:endParaRPr dirty="0">
+              <a:highlight>
+                <a:srgbClr val="FFFF00"/>
+              </a:highlight>
+            </a:endParaRPr>
           </a:p>
           <a:p>
             <a:pPr marL="742950" lvl="1" indent="-285750" algn="l" rtl="0">
@@ -21220,10 +21227,13 @@
               <a:buNone/>
             </a:pPr>
             <a:r>
-              <a:rPr lang="en-US" sz="1800" b="0" i="0" u="none">
-                <a:solidFill>
-                  <a:schemeClr val="dk1"/>
-                </a:solidFill>
+              <a:rPr lang="en-US" sz="1800" b="0" i="0" u="none" dirty="0">
+                <a:solidFill>
+                  <a:schemeClr val="dk1"/>
+                </a:solidFill>
+                <a:highlight>
+                  <a:srgbClr val="FFFF00"/>
+                </a:highlight>
                 <a:latin typeface="Helvetica Neue"/>
                 <a:ea typeface="Helvetica Neue"/>
                 <a:cs typeface="Helvetica Neue"/>
@@ -21232,10 +21242,13 @@
               <a:t>1.	</a:t>
             </a:r>
             <a:r>
-              <a:rPr lang="en-US" sz="1800" b="1" i="0" u="none">
+              <a:rPr lang="en-US" sz="1800" b="1" i="0" u="none" dirty="0">
                 <a:solidFill>
                   <a:schemeClr val="dk2"/>
                 </a:solidFill>
+                <a:highlight>
+                  <a:srgbClr val="FFFF00"/>
+                </a:highlight>
                 <a:latin typeface="Helvetica Neue"/>
                 <a:ea typeface="Helvetica Neue"/>
                 <a:cs typeface="Helvetica Neue"/>
@@ -21243,7 +21256,11 @@
               </a:rPr>
               <a:t>conflict serializability</a:t>
             </a:r>
-            <a:endParaRPr/>
+            <a:endParaRPr dirty="0">
+              <a:highlight>
+                <a:srgbClr val="FFFF00"/>
+              </a:highlight>
+            </a:endParaRPr>
           </a:p>
           <a:p>
             <a:pPr marL="742950" lvl="1" indent="-285750" algn="l" rtl="0">
@@ -21260,10 +21277,13 @@
               <a:buNone/>
             </a:pPr>
             <a:r>
-              <a:rPr lang="en-US" sz="1800" b="0" i="0" u="none">
-                <a:solidFill>
-                  <a:schemeClr val="dk1"/>
-                </a:solidFill>
+              <a:rPr lang="en-US" sz="1800" b="0" i="0" u="none" dirty="0">
+                <a:solidFill>
+                  <a:schemeClr val="dk1"/>
+                </a:solidFill>
+                <a:highlight>
+                  <a:srgbClr val="FFFF00"/>
+                </a:highlight>
                 <a:latin typeface="Helvetica Neue"/>
                 <a:ea typeface="Helvetica Neue"/>
                 <a:cs typeface="Helvetica Neue"/>
@@ -21272,10 +21292,13 @@
               <a:t>2.	</a:t>
             </a:r>
             <a:r>
-              <a:rPr lang="en-US" sz="1800" b="1" i="0" u="none">
+              <a:rPr lang="en-US" sz="1800" b="1" i="0" u="none" dirty="0">
                 <a:solidFill>
                   <a:schemeClr val="dk2"/>
                 </a:solidFill>
+                <a:highlight>
+                  <a:srgbClr val="FFFF00"/>
+                </a:highlight>
                 <a:latin typeface="Helvetica Neue"/>
                 <a:ea typeface="Helvetica Neue"/>
                 <a:cs typeface="Helvetica Neue"/>
@@ -21283,7 +21306,11 @@
               </a:rPr>
               <a:t>view serializability</a:t>
             </a:r>
-            <a:endParaRPr/>
+            <a:endParaRPr dirty="0">
+              <a:highlight>
+                <a:srgbClr val="FFFF00"/>
+              </a:highlight>
+            </a:endParaRPr>
           </a:p>
           <a:p>
             <a:pPr marL="342900" lvl="0" indent="-342900" algn="l" rtl="0">
@@ -21304,7 +21331,7 @@
               <a:buChar char="●"/>
             </a:pPr>
             <a:r>
-              <a:rPr lang="en-US" sz="1800" b="0" i="1" u="none">
+              <a:rPr lang="en-US" sz="1800" b="0" i="1" u="none" dirty="0">
                 <a:solidFill>
                   <a:schemeClr val="dk1"/>
                 </a:solidFill>
@@ -21315,7 +21342,7 @@
               </a:rPr>
               <a:t>Simplified view of transactions</a:t>
             </a:r>
-            <a:endParaRPr/>
+            <a:endParaRPr dirty="0"/>
           </a:p>
           <a:p>
             <a:pPr marL="742950" lvl="1" indent="-285750" algn="l" rtl="0">
@@ -21336,7 +21363,7 @@
               <a:buChar char="●"/>
             </a:pPr>
             <a:r>
-              <a:rPr lang="en-US" sz="1800" b="0" i="0" u="none">
+              <a:rPr lang="en-US" sz="1800" b="0" i="0" u="none" dirty="0">
                 <a:solidFill>
                   <a:schemeClr val="dk1"/>
                 </a:solidFill>
@@ -21348,7 +21375,7 @@
               <a:t>We ignore operations other than </a:t>
             </a:r>
             <a:r>
-              <a:rPr lang="en-US" sz="1800" b="1" i="0" u="none">
+              <a:rPr lang="en-US" sz="1800" b="1" i="0" u="none" dirty="0">
                 <a:solidFill>
                   <a:schemeClr val="dk1"/>
                 </a:solidFill>
@@ -21360,7 +21387,7 @@
               <a:t>read</a:t>
             </a:r>
             <a:r>
-              <a:rPr lang="en-US" sz="1800" b="0" i="0" u="none">
+              <a:rPr lang="en-US" sz="1800" b="0" i="0" u="none" dirty="0">
                 <a:solidFill>
                   <a:schemeClr val="dk1"/>
                 </a:solidFill>
@@ -21372,7 +21399,7 @@
               <a:t> and </a:t>
             </a:r>
             <a:r>
-              <a:rPr lang="en-US" sz="1800" b="1" i="0" u="none">
+              <a:rPr lang="en-US" sz="1800" b="1" i="0" u="none" dirty="0">
                 <a:solidFill>
                   <a:schemeClr val="dk1"/>
                 </a:solidFill>
@@ -21384,7 +21411,7 @@
               <a:t>write</a:t>
             </a:r>
             <a:r>
-              <a:rPr lang="en-US" sz="1800" b="0" i="0" u="none">
+              <a:rPr lang="en-US" sz="1800" b="0" i="0" u="none" dirty="0">
                 <a:solidFill>
                   <a:schemeClr val="dk1"/>
                 </a:solidFill>
@@ -21395,7 +21422,7 @@
               </a:rPr>
               <a:t> instructions</a:t>
             </a:r>
-            <a:endParaRPr/>
+            <a:endParaRPr dirty="0"/>
           </a:p>
           <a:p>
             <a:pPr marL="742950" lvl="1" indent="-285750" algn="l" rtl="0">
@@ -21416,7 +21443,7 @@
               <a:buChar char="●"/>
             </a:pPr>
             <a:r>
-              <a:rPr lang="en-US" sz="1800" b="0" i="0" u="none">
+              <a:rPr lang="en-US" sz="1800" b="0" i="0" u="none" dirty="0">
                 <a:solidFill>
                   <a:schemeClr val="dk1"/>
                 </a:solidFill>
@@ -21427,7 +21454,7 @@
               </a:rPr>
               <a:t>We assume that transactions may perform arbitrary computations on data in local buffers in between reads and writes.  </a:t>
             </a:r>
-            <a:endParaRPr/>
+            <a:endParaRPr dirty="0"/>
           </a:p>
           <a:p>
             <a:pPr marL="742950" lvl="1" indent="-285750" algn="l" rtl="0">
@@ -21448,7 +21475,7 @@
               <a:buChar char="●"/>
             </a:pPr>
             <a:r>
-              <a:rPr lang="en-US" sz="1800" b="0" i="0" u="none">
+              <a:rPr lang="en-US" sz="1800" b="0" i="0" u="none" dirty="0">
                 <a:solidFill>
                   <a:schemeClr val="dk1"/>
                 </a:solidFill>
@@ -21460,7 +21487,7 @@
               <a:t>Our simplified schedules consist of only </a:t>
             </a:r>
             <a:r>
-              <a:rPr lang="en-US" sz="1800" b="1" i="0" u="none">
+              <a:rPr lang="en-US" sz="1800" b="1" i="0" u="none" dirty="0">
                 <a:solidFill>
                   <a:schemeClr val="dk1"/>
                 </a:solidFill>
@@ -21472,7 +21499,7 @@
               <a:t>read</a:t>
             </a:r>
             <a:r>
-              <a:rPr lang="en-US" sz="1800" b="0" i="0" u="none">
+              <a:rPr lang="en-US" sz="1800" b="0" i="0" u="none" dirty="0">
                 <a:solidFill>
                   <a:schemeClr val="dk1"/>
                 </a:solidFill>
@@ -21484,7 +21511,7 @@
               <a:t> and </a:t>
             </a:r>
             <a:r>
-              <a:rPr lang="en-US" sz="1800" b="1" i="0" u="none">
+              <a:rPr lang="en-US" sz="1800" b="1" i="0" u="none" dirty="0">
                 <a:solidFill>
                   <a:schemeClr val="dk1"/>
                 </a:solidFill>
@@ -21496,7 +21523,7 @@
               <a:t>write </a:t>
             </a:r>
             <a:r>
-              <a:rPr lang="en-US" sz="1800" b="0" i="0" u="none">
+              <a:rPr lang="en-US" sz="1800" b="0" i="0" u="none" dirty="0">
                 <a:solidFill>
                   <a:schemeClr val="dk1"/>
                 </a:solidFill>
@@ -21507,7 +21534,7 @@
               </a:rPr>
               <a:t>instructions.</a:t>
             </a:r>
-            <a:endParaRPr/>
+            <a:endParaRPr dirty="0"/>
           </a:p>
         </p:txBody>
       </p:sp>
@@ -23542,10 +23569,13 @@
               <a:buChar char="●"/>
             </a:pPr>
             <a:r>
-              <a:rPr lang="en-US" sz="1800" b="0" i="0" u="none">
-                <a:solidFill>
-                  <a:schemeClr val="dk1"/>
-                </a:solidFill>
+              <a:rPr lang="en-US" sz="1800" b="0" i="0" u="none" dirty="0">
+                <a:solidFill>
+                  <a:schemeClr val="dk1"/>
+                </a:solidFill>
+                <a:highlight>
+                  <a:srgbClr val="FFFF00"/>
+                </a:highlight>
                 <a:latin typeface="Helvetica Neue"/>
                 <a:ea typeface="Helvetica Neue"/>
                 <a:cs typeface="Helvetica Neue"/>
@@ -23554,10 +23584,13 @@
               <a:t>If a schedule </a:t>
             </a:r>
             <a:r>
-              <a:rPr lang="en-US" sz="1800" b="0" i="1" u="none">
-                <a:solidFill>
-                  <a:schemeClr val="dk1"/>
-                </a:solidFill>
+              <a:rPr lang="en-US" sz="1800" b="0" i="1" u="none" dirty="0">
+                <a:solidFill>
+                  <a:schemeClr val="dk1"/>
+                </a:solidFill>
+                <a:highlight>
+                  <a:srgbClr val="FFFF00"/>
+                </a:highlight>
                 <a:latin typeface="Helvetica Neue"/>
                 <a:ea typeface="Helvetica Neue"/>
                 <a:cs typeface="Helvetica Neue"/>
@@ -23566,10 +23599,13 @@
               <a:t>S</a:t>
             </a:r>
             <a:r>
-              <a:rPr lang="en-US" sz="1800" b="0" i="0" u="none">
-                <a:solidFill>
-                  <a:schemeClr val="dk1"/>
-                </a:solidFill>
+              <a:rPr lang="en-US" sz="1800" b="0" i="0" u="none" dirty="0">
+                <a:solidFill>
+                  <a:schemeClr val="dk1"/>
+                </a:solidFill>
+                <a:highlight>
+                  <a:srgbClr val="FFFF00"/>
+                </a:highlight>
                 <a:latin typeface="Helvetica Neue"/>
                 <a:ea typeface="Helvetica Neue"/>
                 <a:cs typeface="Helvetica Neue"/>
@@ -23578,10 +23614,13 @@
               <a:t> can be transformed into a schedule </a:t>
             </a:r>
             <a:r>
-              <a:rPr lang="en-US" sz="1800" b="0" i="1" u="none">
-                <a:solidFill>
-                  <a:schemeClr val="dk1"/>
-                </a:solidFill>
+              <a:rPr lang="en-US" sz="1800" b="0" i="1" u="none" dirty="0">
+                <a:solidFill>
+                  <a:schemeClr val="dk1"/>
+                </a:solidFill>
+                <a:highlight>
+                  <a:srgbClr val="FFFF00"/>
+                </a:highlight>
                 <a:latin typeface="Helvetica Neue"/>
                 <a:ea typeface="Helvetica Neue"/>
                 <a:cs typeface="Helvetica Neue"/>
@@ -23590,10 +23629,13 @@
               <a:t>S´ </a:t>
             </a:r>
             <a:r>
-              <a:rPr lang="en-US" sz="1800" b="0" i="0" u="none">
-                <a:solidFill>
-                  <a:schemeClr val="dk1"/>
-                </a:solidFill>
+              <a:rPr lang="en-US" sz="1800" b="0" i="0" u="none" dirty="0">
+                <a:solidFill>
+                  <a:schemeClr val="dk1"/>
+                </a:solidFill>
+                <a:highlight>
+                  <a:srgbClr val="FFFF00"/>
+                </a:highlight>
                 <a:latin typeface="Helvetica Neue"/>
                 <a:ea typeface="Helvetica Neue"/>
                 <a:cs typeface="Helvetica Neue"/>
@@ -23602,10 +23644,13 @@
               <a:t>by a series of swaps of non-conflicting instructions, we say that </a:t>
             </a:r>
             <a:r>
-              <a:rPr lang="en-US" sz="1800" b="0" i="1" u="none">
-                <a:solidFill>
-                  <a:schemeClr val="dk1"/>
-                </a:solidFill>
+              <a:rPr lang="en-US" sz="1800" b="0" i="1" u="none" dirty="0">
+                <a:solidFill>
+                  <a:schemeClr val="dk1"/>
+                </a:solidFill>
+                <a:highlight>
+                  <a:srgbClr val="FFFF00"/>
+                </a:highlight>
                 <a:latin typeface="Helvetica Neue"/>
                 <a:ea typeface="Helvetica Neue"/>
                 <a:cs typeface="Helvetica Neue"/>
@@ -23614,10 +23659,13 @@
               <a:t>S</a:t>
             </a:r>
             <a:r>
-              <a:rPr lang="en-US" sz="1800" b="0" i="0" u="none">
-                <a:solidFill>
-                  <a:schemeClr val="dk1"/>
-                </a:solidFill>
+              <a:rPr lang="en-US" sz="1800" b="0" i="0" u="none" dirty="0">
+                <a:solidFill>
+                  <a:schemeClr val="dk1"/>
+                </a:solidFill>
+                <a:highlight>
+                  <a:srgbClr val="FFFF00"/>
+                </a:highlight>
                 <a:latin typeface="Helvetica Neue"/>
                 <a:ea typeface="Helvetica Neue"/>
                 <a:cs typeface="Helvetica Neue"/>
@@ -23626,10 +23674,13 @@
               <a:t> and </a:t>
             </a:r>
             <a:r>
-              <a:rPr lang="en-US" sz="1800" b="0" i="1" u="none">
-                <a:solidFill>
-                  <a:schemeClr val="dk1"/>
-                </a:solidFill>
+              <a:rPr lang="en-US" sz="1800" b="0" i="1" u="none" dirty="0">
+                <a:solidFill>
+                  <a:schemeClr val="dk1"/>
+                </a:solidFill>
+                <a:highlight>
+                  <a:srgbClr val="FFFF00"/>
+                </a:highlight>
                 <a:latin typeface="Helvetica Neue"/>
                 <a:ea typeface="Helvetica Neue"/>
                 <a:cs typeface="Helvetica Neue"/>
@@ -23638,10 +23689,13 @@
               <a:t>S´ </a:t>
             </a:r>
             <a:r>
-              <a:rPr lang="en-US" sz="1800" b="0" i="0" u="none">
-                <a:solidFill>
-                  <a:schemeClr val="dk1"/>
-                </a:solidFill>
+              <a:rPr lang="en-US" sz="1800" b="0" i="0" u="none" dirty="0">
+                <a:solidFill>
+                  <a:schemeClr val="dk1"/>
+                </a:solidFill>
+                <a:highlight>
+                  <a:srgbClr val="FFFF00"/>
+                </a:highlight>
                 <a:latin typeface="Helvetica Neue"/>
                 <a:ea typeface="Helvetica Neue"/>
                 <a:cs typeface="Helvetica Neue"/>
@@ -23650,10 +23704,13 @@
               <a:t>are </a:t>
             </a:r>
             <a:r>
-              <a:rPr lang="en-US" sz="1800" b="1" i="0" u="none">
+              <a:rPr lang="en-US" sz="1800" b="1" i="0" u="none" dirty="0">
                 <a:solidFill>
                   <a:schemeClr val="dk2"/>
                 </a:solidFill>
+                <a:highlight>
+                  <a:srgbClr val="FFFF00"/>
+                </a:highlight>
                 <a:latin typeface="Helvetica Neue"/>
                 <a:ea typeface="Helvetica Neue"/>
                 <a:cs typeface="Helvetica Neue"/>
@@ -23662,10 +23719,13 @@
               <a:t>conflict equivalent</a:t>
             </a:r>
             <a:r>
-              <a:rPr lang="en-US" sz="1800" b="0" i="1" u="none">
-                <a:solidFill>
-                  <a:schemeClr val="dk1"/>
-                </a:solidFill>
+              <a:rPr lang="en-US" sz="1800" b="0" i="1" u="none" dirty="0">
+                <a:solidFill>
+                  <a:schemeClr val="dk1"/>
+                </a:solidFill>
+                <a:highlight>
+                  <a:srgbClr val="FFFF00"/>
+                </a:highlight>
                 <a:latin typeface="Helvetica Neue"/>
                 <a:ea typeface="Helvetica Neue"/>
                 <a:cs typeface="Helvetica Neue"/>
@@ -23673,7 +23733,11 @@
               </a:rPr>
               <a:t>.</a:t>
             </a:r>
-            <a:endParaRPr/>
+            <a:endParaRPr dirty="0">
+              <a:highlight>
+                <a:srgbClr val="FFFF00"/>
+              </a:highlight>
+            </a:endParaRPr>
           </a:p>
           <a:p>
             <a:pPr marL="342900" lvl="0" indent="-342900" algn="l" rtl="0">
@@ -23694,7 +23758,7 @@
               <a:buChar char="●"/>
             </a:pPr>
             <a:r>
-              <a:rPr lang="en-US" sz="1800" b="0" i="0" u="none">
+              <a:rPr lang="en-US" sz="1800" b="0" i="0" u="none" dirty="0">
                 <a:solidFill>
                   <a:schemeClr val="dk1"/>
                 </a:solidFill>
@@ -23706,7 +23770,7 @@
               <a:t>We say that a schedule </a:t>
             </a:r>
             <a:r>
-              <a:rPr lang="en-US" sz="1800" b="0" i="1" u="none">
+              <a:rPr lang="en-US" sz="1800" b="0" i="1" u="none" dirty="0">
                 <a:solidFill>
                   <a:schemeClr val="dk1"/>
                 </a:solidFill>
@@ -23718,7 +23782,7 @@
               <a:t>S</a:t>
             </a:r>
             <a:r>
-              <a:rPr lang="en-US" sz="1800" b="0" i="0" u="none">
+              <a:rPr lang="en-US" sz="1800" b="0" i="0" u="none" dirty="0">
                 <a:solidFill>
                   <a:schemeClr val="dk1"/>
                 </a:solidFill>
@@ -23730,7 +23794,7 @@
               <a:t> is </a:t>
             </a:r>
             <a:r>
-              <a:rPr lang="en-US" sz="1800" b="1" i="0" u="none">
+              <a:rPr lang="en-US" sz="1800" b="1" i="0" u="none" dirty="0">
                 <a:solidFill>
                   <a:schemeClr val="dk2"/>
                 </a:solidFill>
@@ -23742,7 +23806,7 @@
               <a:t>conflict serializable</a:t>
             </a:r>
             <a:r>
-              <a:rPr lang="en-US" sz="1800" b="0" i="0" u="none">
+              <a:rPr lang="en-US" sz="1800" b="0" i="0" u="none" dirty="0">
                 <a:solidFill>
                   <a:schemeClr val="dk1"/>
                 </a:solidFill>
@@ -23753,7 +23817,7 @@
               </a:rPr>
               <a:t> if it is conflict equivalent to a serial schedule</a:t>
             </a:r>
-            <a:endParaRPr/>
+            <a:endParaRPr dirty="0"/>
           </a:p>
         </p:txBody>
       </p:sp>
@@ -30001,7 +30065,7 @@
               <a:buChar char="●"/>
             </a:pPr>
             <a:r>
-              <a:rPr lang="en-US" sz="2400" b="1" i="0" u="none">
+              <a:rPr lang="en-US" sz="2400" b="1" i="0" u="none" dirty="0">
                 <a:solidFill>
                   <a:schemeClr val="dk1"/>
                 </a:solidFill>
@@ -30013,7 +30077,7 @@
               <a:t>Consider some schedule of a set of transactions </a:t>
             </a:r>
             <a:r>
-              <a:rPr lang="en-US" sz="2400" b="1" i="1" u="none">
+              <a:rPr lang="en-US" sz="2400" b="1" i="1" u="none" dirty="0">
                 <a:solidFill>
                   <a:schemeClr val="dk1"/>
                 </a:solidFill>
@@ -30025,7 +30089,7 @@
               <a:t>T</a:t>
             </a:r>
             <a:r>
-              <a:rPr lang="en-US" sz="2400" b="1" i="0" u="none" baseline="-25000">
+              <a:rPr lang="en-US" sz="2400" b="1" i="0" u="none" baseline="-25000" dirty="0">
                 <a:solidFill>
                   <a:schemeClr val="dk1"/>
                 </a:solidFill>
@@ -30037,7 +30101,7 @@
               <a:t>1</a:t>
             </a:r>
             <a:r>
-              <a:rPr lang="en-US" sz="2400" b="1" i="0" u="none">
+              <a:rPr lang="en-US" sz="2400" b="1" i="0" u="none" dirty="0">
                 <a:solidFill>
                   <a:schemeClr val="dk1"/>
                 </a:solidFill>
@@ -30049,7 +30113,7 @@
               <a:t>, </a:t>
             </a:r>
             <a:r>
-              <a:rPr lang="en-US" sz="2400" b="1" i="1" u="none">
+              <a:rPr lang="en-US" sz="2400" b="1" i="1" u="none" dirty="0">
                 <a:solidFill>
                   <a:schemeClr val="dk1"/>
                 </a:solidFill>
@@ -30061,7 +30125,7 @@
               <a:t>T</a:t>
             </a:r>
             <a:r>
-              <a:rPr lang="en-US" sz="2400" b="1" i="0" u="none" baseline="-25000">
+              <a:rPr lang="en-US" sz="2400" b="1" i="0" u="none" baseline="-25000" dirty="0">
                 <a:solidFill>
                   <a:schemeClr val="dk1"/>
                 </a:solidFill>
@@ -30073,7 +30137,7 @@
               <a:t>2</a:t>
             </a:r>
             <a:r>
-              <a:rPr lang="en-US" sz="2400" b="1" i="0" u="none">
+              <a:rPr lang="en-US" sz="2400" b="1" i="0" u="none" dirty="0">
                 <a:solidFill>
                   <a:schemeClr val="dk1"/>
                 </a:solidFill>
@@ -30085,7 +30149,7 @@
               <a:t>, ..., </a:t>
             </a:r>
             <a:r>
-              <a:rPr lang="en-US" sz="2400" b="1" i="1" u="none">
+              <a:rPr lang="en-US" sz="2400" b="1" i="1" u="none" dirty="0">
                 <a:solidFill>
                   <a:schemeClr val="dk1"/>
                 </a:solidFill>
@@ -30097,7 +30161,7 @@
               <a:t>T</a:t>
             </a:r>
             <a:r>
-              <a:rPr lang="en-US" sz="2400" b="1" i="1" u="none" baseline="-25000">
+              <a:rPr lang="en-US" sz="2400" b="1" i="1" u="none" baseline="-25000" dirty="0">
                 <a:solidFill>
                   <a:schemeClr val="dk1"/>
                 </a:solidFill>
@@ -30108,7 +30172,7 @@
               </a:rPr>
               <a:t>n</a:t>
             </a:r>
-            <a:endParaRPr sz="2400" b="1" i="0" u="none">
+            <a:endParaRPr sz="2400" b="1" i="0" u="none" dirty="0">
               <a:solidFill>
                 <a:schemeClr val="dk1"/>
               </a:solidFill>
@@ -30137,10 +30201,13 @@
               <a:buChar char="●"/>
             </a:pPr>
             <a:r>
-              <a:rPr lang="en-US" sz="2400" b="1" i="0" u="none">
+              <a:rPr lang="en-US" sz="2400" b="1" i="0" u="none" dirty="0">
                 <a:solidFill>
                   <a:schemeClr val="dk2"/>
                 </a:solidFill>
+                <a:highlight>
+                  <a:srgbClr val="FFFF00"/>
+                </a:highlight>
                 <a:latin typeface="Helvetica Neue"/>
                 <a:ea typeface="Helvetica Neue"/>
                 <a:cs typeface="Helvetica Neue"/>
@@ -30149,10 +30216,13 @@
               <a:t>Precedence graph</a:t>
             </a:r>
             <a:r>
-              <a:rPr lang="en-US" sz="2400" b="1" i="1" u="none">
-                <a:solidFill>
-                  <a:schemeClr val="dk1"/>
-                </a:solidFill>
+              <a:rPr lang="en-US" sz="2400" b="1" i="1" u="none" dirty="0">
+                <a:solidFill>
+                  <a:schemeClr val="dk1"/>
+                </a:solidFill>
+                <a:highlight>
+                  <a:srgbClr val="FFFF00"/>
+                </a:highlight>
                 <a:latin typeface="Helvetica Neue"/>
                 <a:ea typeface="Helvetica Neue"/>
                 <a:cs typeface="Helvetica Neue"/>
@@ -30161,10 +30231,13 @@
               <a:t> </a:t>
             </a:r>
             <a:r>
-              <a:rPr lang="en-US" sz="2400" b="1" i="0" u="none">
-                <a:solidFill>
-                  <a:schemeClr val="dk1"/>
-                </a:solidFill>
+              <a:rPr lang="en-US" sz="2400" b="1" i="0" u="none" dirty="0">
+                <a:solidFill>
+                  <a:schemeClr val="dk1"/>
+                </a:solidFill>
+                <a:highlight>
+                  <a:srgbClr val="FFFF00"/>
+                </a:highlight>
                 <a:latin typeface="Helvetica Neue"/>
                 <a:ea typeface="Helvetica Neue"/>
                 <a:cs typeface="Helvetica Neue"/>
@@ -30172,7 +30245,11 @@
               </a:rPr>
               <a:t>— a direct graph where the vertices are the transactions (names).</a:t>
             </a:r>
-            <a:endParaRPr/>
+            <a:endParaRPr dirty="0">
+              <a:highlight>
+                <a:srgbClr val="FFFF00"/>
+              </a:highlight>
+            </a:endParaRPr>
           </a:p>
           <a:p>
             <a:pPr marL="342900" lvl="0" indent="-342900" algn="l" rtl="0">
@@ -30193,7 +30270,7 @@
               <a:buChar char="●"/>
             </a:pPr>
             <a:r>
-              <a:rPr lang="en-US" sz="2400" b="1" i="0" u="none">
+              <a:rPr lang="en-US" sz="2400" b="1" i="0" u="none" dirty="0">
                 <a:solidFill>
                   <a:schemeClr val="dk1"/>
                 </a:solidFill>
@@ -30205,7 +30282,7 @@
               <a:t>We draw an arc from </a:t>
             </a:r>
             <a:r>
-              <a:rPr lang="en-US" sz="2400" b="1" i="1" u="none">
+              <a:rPr lang="en-US" sz="2400" b="1" i="1" u="none" dirty="0">
                 <a:solidFill>
                   <a:schemeClr val="dk1"/>
                 </a:solidFill>
@@ -30217,7 +30294,7 @@
               <a:t>T</a:t>
             </a:r>
             <a:r>
-              <a:rPr lang="en-US" sz="2400" b="1" i="1" u="none" baseline="-25000">
+              <a:rPr lang="en-US" sz="2400" b="1" i="1" u="none" baseline="-25000" dirty="0">
                 <a:solidFill>
                   <a:schemeClr val="dk1"/>
                 </a:solidFill>
@@ -30229,7 +30306,7 @@
               <a:t>i</a:t>
             </a:r>
             <a:r>
-              <a:rPr lang="en-US" sz="2400" b="1" i="1" u="none">
+              <a:rPr lang="en-US" sz="2400" b="1" i="1" u="none" dirty="0">
                 <a:solidFill>
                   <a:schemeClr val="dk1"/>
                 </a:solidFill>
@@ -30241,7 +30318,7 @@
               <a:t> </a:t>
             </a:r>
             <a:r>
-              <a:rPr lang="en-US" sz="2400" b="1" i="0" u="none">
+              <a:rPr lang="en-US" sz="2400" b="1" i="0" u="none" dirty="0">
                 <a:solidFill>
                   <a:schemeClr val="dk1"/>
                 </a:solidFill>
@@ -30253,7 +30330,7 @@
               <a:t>to </a:t>
             </a:r>
             <a:r>
-              <a:rPr lang="en-US" sz="2400" b="1" i="1" u="none">
+              <a:rPr lang="en-US" sz="2400" b="1" i="1" u="none" dirty="0" err="1">
                 <a:solidFill>
                   <a:schemeClr val="dk1"/>
                 </a:solidFill>
@@ -30265,7 +30342,7 @@
               <a:t>T</a:t>
             </a:r>
             <a:r>
-              <a:rPr lang="en-US" sz="2400" b="1" i="1" u="none" baseline="-25000">
+              <a:rPr lang="en-US" sz="2400" b="1" i="1" u="none" baseline="-25000" dirty="0" err="1">
                 <a:solidFill>
                   <a:schemeClr val="dk1"/>
                 </a:solidFill>
@@ -30277,7 +30354,7 @@
               <a:t>j</a:t>
             </a:r>
             <a:r>
-              <a:rPr lang="en-US" sz="2400" b="1" i="1" u="none">
+              <a:rPr lang="en-US" sz="2400" b="1" i="1" u="none" dirty="0">
                 <a:solidFill>
                   <a:schemeClr val="dk1"/>
                 </a:solidFill>
@@ -30289,7 +30366,7 @@
               <a:t> </a:t>
             </a:r>
             <a:r>
-              <a:rPr lang="en-US" sz="2400" b="1" i="0" u="none">
+              <a:rPr lang="en-US" sz="2400" b="1" i="0" u="none" dirty="0">
                 <a:solidFill>
                   <a:schemeClr val="dk1"/>
                 </a:solidFill>
@@ -30301,7 +30378,7 @@
               <a:t>if the two transaction conflict, and </a:t>
             </a:r>
             <a:r>
-              <a:rPr lang="en-US" sz="2400" b="1" i="1" u="none">
+              <a:rPr lang="en-US" sz="2400" b="1" i="1" u="none" dirty="0">
                 <a:solidFill>
                   <a:schemeClr val="dk1"/>
                 </a:solidFill>
@@ -30313,7 +30390,7 @@
               <a:t>T</a:t>
             </a:r>
             <a:r>
-              <a:rPr lang="en-US" sz="2400" b="1" i="1" u="none" baseline="-25000">
+              <a:rPr lang="en-US" sz="2400" b="1" i="1" u="none" baseline="-25000" dirty="0">
                 <a:solidFill>
                   <a:schemeClr val="dk1"/>
                 </a:solidFill>
@@ -30325,7 +30402,7 @@
               <a:t>i</a:t>
             </a:r>
             <a:r>
-              <a:rPr lang="en-US" sz="2400" b="1" i="1" u="none">
+              <a:rPr lang="en-US" sz="2400" b="1" i="1" u="none" dirty="0">
                 <a:solidFill>
                   <a:schemeClr val="dk1"/>
                 </a:solidFill>
@@ -30337,7 +30414,7 @@
               <a:t> </a:t>
             </a:r>
             <a:r>
-              <a:rPr lang="en-US" sz="2400" b="1" i="0" u="none">
+              <a:rPr lang="en-US" sz="2400" b="1" i="0" u="none" dirty="0">
                 <a:solidFill>
                   <a:schemeClr val="dk1"/>
                 </a:solidFill>
@@ -30348,7 +30425,7 @@
               </a:rPr>
               <a:t>accessed the data item on which the conflict arose earlier.</a:t>
             </a:r>
-            <a:endParaRPr/>
+            <a:endParaRPr dirty="0"/>
           </a:p>
           <a:p>
             <a:pPr marL="342900" lvl="0" indent="-342900" algn="l" rtl="0">
@@ -30369,7 +30446,7 @@
               <a:buChar char="●"/>
             </a:pPr>
             <a:r>
-              <a:rPr lang="en-US" sz="2400" b="1" i="0" u="none">
+              <a:rPr lang="en-US" sz="2400" b="1" i="0" u="none" dirty="0">
                 <a:solidFill>
                   <a:schemeClr val="dk1"/>
                 </a:solidFill>
@@ -30380,7 +30457,7 @@
               </a:rPr>
               <a:t>We may label the arc by the item that was accessed.</a:t>
             </a:r>
-            <a:endParaRPr/>
+            <a:endParaRPr dirty="0"/>
           </a:p>
           <a:p>
             <a:pPr marL="342900" lvl="0" indent="-342900" algn="l" rtl="0">
@@ -30401,7 +30478,7 @@
               <a:buChar char="●"/>
             </a:pPr>
             <a:r>
-              <a:rPr lang="en-US" sz="2400" b="1" i="0" u="none">
+              <a:rPr lang="en-US" sz="2400" b="1" i="0" u="none" dirty="0">
                 <a:solidFill>
                   <a:schemeClr val="dk1"/>
                 </a:solidFill>
@@ -30412,7 +30489,7 @@
               </a:rPr>
               <a:t>Example 1</a:t>
             </a:r>
-            <a:endParaRPr/>
+            <a:endParaRPr dirty="0"/>
           </a:p>
         </p:txBody>
       </p:sp>
